--- a/praesentationen/input-02-cloud-grundlagen.pptx
+++ b/praesentationen/input-02-cloud-grundlagen.pptx
@@ -118,7 +118,7 @@
   <p:extLst>
     <p:ext uri="{521415D9-36F7-43E2-AB2F-B90AF26B5E84}">
       <p14:sectionLst xmlns:p14="http://schemas.microsoft.com/office/powerpoint/2010/main">
-        <p14:section name="Cloud-Grundlagen" id="{81b7e015-c2b9-3d86-129d-50dac3b990a2}">
+        <p14:section name="Cloud-Grundlagen" id="{270b20a6-d01f-107a-da8f-e70aa127ec3d}">
           <p14:sldIdLst>
             <p14:sldId id="256"/>
             <p14:sldId id="257"/>

--- a/praesentationen/input-02-cloud-grundlagen.pptx
+++ b/praesentationen/input-02-cloud-grundlagen.pptx
@@ -118,7 +118,7 @@
   <p:extLst>
     <p:ext uri="{521415D9-36F7-43E2-AB2F-B90AF26B5E84}">
       <p14:sectionLst xmlns:p14="http://schemas.microsoft.com/office/powerpoint/2010/main">
-        <p14:section name="Cloud-Grundlagen" id="{270b20a6-d01f-107a-da8f-e70aa127ec3d}">
+        <p14:section name="Cloud-Grundlagen" id="{597f74b9-e394-41a3-97cb-e639aacabc13}">
           <p14:sldIdLst>
             <p14:sldId id="256"/>
             <p14:sldId id="257"/>
@@ -5112,7 +5112,7 @@
                   <a:srgbClr val="27303A"/>
                 </a:solidFill>
               </a:rPr>
-              <a:t>On Premises</a:t>
+              <a:t>Selbst betrieben</a:t>
             </a:r>
             <a:endParaRPr lang="en-US" sz="2000" dirty="0"/>
           </a:p>
@@ -5151,7 +5151,7 @@
                   <a:srgbClr val="27303A"/>
                 </a:solidFill>
               </a:rPr>
-              <a:t>Alles selbst: Küche, Ofen, Teig, Belag.</a:t>
+              <a:t>(On Premises) Alles selbst: Küche, Ofen, Teig, Belag.</a:t>
             </a:r>
             <a:endParaRPr lang="en-US" sz="1600" dirty="0"/>
           </a:p>
@@ -6073,7 +6073,7 @@
                             <a:srgbClr val="27303A"/>
                           </a:solidFill>
                         </a:rPr>
-                        <a:t>Azure Virtual Machines, Virtual Network, Managed Disks</a:t>
+                        <a:t>Azure Virtual Machines, Azure Virtual Network, Azure Managed Disks</a:t>
                       </a:r>
                       <a:endParaRPr lang="en-US" sz="1700" dirty="0"/>
                     </a:p>
@@ -6818,7 +6818,7 @@
                   <a:srgbClr val="27303A"/>
                 </a:solidFill>
               </a:rPr>
-              <a:t>Public, Private, Hybrid</a:t>
+              <a:t>Öffentlich, privat, hybrid</a:t>
             </a:r>
             <a:endParaRPr lang="en-US" sz="3400" dirty="0"/>
           </a:p>
@@ -6932,7 +6932,7 @@
                   <a:srgbClr val="27303A"/>
                 </a:solidFill>
               </a:rPr>
-              <a:t>Public Cloud</a:t>
+              <a:t>Öffentliche Cloud</a:t>
             </a:r>
             <a:endParaRPr lang="en-US" sz="2000" dirty="0"/>
           </a:p>
@@ -6971,7 +6971,7 @@
                   <a:srgbClr val="27303A"/>
                 </a:solidFill>
               </a:rPr>
-              <a:t>Infrastruktur eines öffentlichen Anbieters, geteilt mit anderen Kunden.</a:t>
+              <a:t>(Public Cloud) Infrastruktur eines öffentlichen Anbieters, geteilt mit anderen Kunden.</a:t>
             </a:r>
             <a:endParaRPr lang="en-US" sz="1600" dirty="0"/>
           </a:p>
@@ -7124,7 +7124,7 @@
                   <a:srgbClr val="27303A"/>
                 </a:solidFill>
               </a:rPr>
-              <a:t>Cloud exklusiv für eine Organisation, z. B. Banken und Behörden.</a:t>
+              <a:t>Cloud nur für eine Organisation, z. B. Banken und Behörden.</a:t>
             </a:r>
             <a:endParaRPr lang="en-US" sz="1600" dirty="0"/>
           </a:p>
@@ -7238,7 +7238,7 @@
                   <a:srgbClr val="27303A"/>
                 </a:solidFill>
               </a:rPr>
-              <a:t>Hybrid Cloud</a:t>
+              <a:t>Hybride Cloud</a:t>
             </a:r>
             <a:endParaRPr lang="en-US" sz="2000" dirty="0"/>
           </a:p>
@@ -7277,7 +7277,7 @@
                   <a:srgbClr val="27303A"/>
                 </a:solidFill>
               </a:rPr>
-              <a:t>Ein Teil im eigenen Rechenzentrum, ein Teil in der Public Cloud – heute der Normalfall.</a:t>
+              <a:t>(Hybrid Cloud) Ein Teil im eigenen Rechenzentrum, ein Teil in der öffentlichen Cloud – heute der Normalfall.</a:t>
             </a:r>
             <a:endParaRPr lang="en-US" sz="1600" dirty="0"/>
           </a:p>
@@ -7385,7 +7385,7 @@
                   <a:srgbClr val="27303A"/>
                 </a:solidFill>
               </a:rPr>
-              <a:t>Hybrid Cloud am Beispiel</a:t>
+              <a:t>Hybride Cloud am Beispiel</a:t>
             </a:r>
             <a:endParaRPr lang="en-US" sz="3400" dirty="0"/>
           </a:p>
@@ -7393,7 +7393,7 @@
       </p:sp>
       <p:pic>
         <p:nvPicPr>
-          <p:cNvPr id="3" name="diagramm" descr="Hybrid Cloud am Beispiel">    </p:cNvPr>
+          <p:cNvPr id="3" name="diagramm" descr="Hybride Cloud am Beispiel">    </p:cNvPr>
           <p:cNvPicPr>
             <a:picLocks noChangeAspect="1"/>
           </p:cNvPicPr>
@@ -7553,7 +7553,7 @@
                   <a:srgbClr val="27303A"/>
                 </a:solidFill>
               </a:rPr>
-              <a:t>Geteilte Verantwortung</a:t>
+              <a:t>Geteilte Verantwortung (Shared Responsibility)</a:t>
             </a:r>
             <a:endParaRPr lang="en-US" sz="3400" dirty="0"/>
           </a:p>

--- a/praesentationen/input-02-cloud-grundlagen.pptx
+++ b/praesentationen/input-02-cloud-grundlagen.pptx
@@ -118,7 +118,7 @@
   <p:extLst>
     <p:ext uri="{521415D9-36F7-43E2-AB2F-B90AF26B5E84}">
       <p14:sectionLst xmlns:p14="http://schemas.microsoft.com/office/powerpoint/2010/main">
-        <p14:section name="Cloud-Grundlagen" id="{597f74b9-e394-41a3-97cb-e639aacabc13}">
+        <p14:section name="Cloud-Grundlagen" id="{e9c7210a-de68-7c59-45e2-cfbf074d59ef}">
           <p14:sldIdLst>
             <p14:sldId id="256"/>
             <p14:sldId id="257"/>
@@ -1584,7 +1584,7 @@
     <p:bg>
       <p:bgPr>
         <a:solidFill>
-          <a:srgbClr val="27303A"/>
+          <a:srgbClr val="FFFFFF"/>
         </a:solidFill>
       </p:bgPr>
     </p:bg>
@@ -1604,7 +1604,7 @@
       </p:grpSpPr>
       <p:pic>
         <p:nvPicPr>
-          <p:cNvPr id="2" name="Image 0" descr="C:\Users\Thanam\AppData\Local\Temp\claude\c--Projekt-Trainings-azure-basics-training\a9e0bf4e-0d08-4082-a38a-5b8886538508\scratchpad\pptx\assets\logo-hell.png">    </p:cNvPr>
+          <p:cNvPr id="2" name="Image 0" descr="C:\Users\Thanam\AppData\Local\Temp\claude\c--Projekt-Trainings-azure-basics-training\a7a6b8eb-22f3-4b42-aecc-5af05d1502b1\scratchpad\folien\assets\logo-dunkel.png">    </p:cNvPr>
           <p:cNvPicPr>
             <a:picLocks noChangeAspect="1"/>
           </p:cNvPicPr>
@@ -1628,7 +1628,7 @@
       </p:pic>
       <p:pic>
         <p:nvPicPr>
-          <p:cNvPr id="3" name="Image 1" descr="C:\Users\Thanam\AppData\Local\Temp\claude\c--Projekt-Trainings-azure-basics-training\a9e0bf4e-0d08-4082-a38a-5b8886538508\scratchpad\pptx\assets\wolke.png">    </p:cNvPr>
+          <p:cNvPr id="3" name="Image 1" descr="C:\Users\Thanam\AppData\Local\Temp\claude\c--Projekt-Trainings-azure-basics-training\a7a6b8eb-22f3-4b42-aecc-5af05d1502b1\scratchpad\folien\assets\wolke.png">    </p:cNvPr>
           <p:cNvPicPr>
             <a:picLocks noChangeAspect="1"/>
           </p:cNvPicPr>
@@ -1676,7 +1676,7 @@
               <a:buNone/>
               <a:defRPr lang="en-US" sz="4400" b="1" dirty="0">
                 <a:solidFill>
-                  <a:srgbClr val="FFFFFF"/>
+                  <a:srgbClr val="27303A"/>
                 </a:solidFill>
               </a:defRPr>
             </a:lvl1pPr>
@@ -1715,7 +1715,7 @@
               <a:buNone/>
               <a:defRPr lang="en-US" sz="2000" dirty="0">
                 <a:solidFill>
-                  <a:srgbClr val="DEE2FB"/>
+                  <a:srgbClr val="006FAD"/>
                 </a:solidFill>
               </a:defRPr>
             </a:lvl1pPr>
@@ -1755,7 +1755,7 @@
             <a:r>
               <a:rPr lang="en-US" sz="1200" dirty="0">
                 <a:solidFill>
-                  <a:srgbClr val="DEE2FB"/>
+                  <a:srgbClr val="6F6F6F"/>
                 </a:solidFill>
               </a:rPr>
               <a:t>Kanton Zürich · ICT-Grundbildung · PAT Cloud Solutions</a:t>
@@ -1778,7 +1778,7 @@
     <p:bg>
       <p:bgPr>
         <a:solidFill>
-          <a:srgbClr val="006FAD"/>
+          <a:srgbClr val="F7F7F7"/>
         </a:solidFill>
       </p:bgPr>
     </p:bg>
@@ -1798,7 +1798,7 @@
       </p:grpSpPr>
       <p:pic>
         <p:nvPicPr>
-          <p:cNvPr id="2" name="Image 0" descr="C:\Users\Thanam\AppData\Local\Temp\claude\c--Projekt-Trainings-azure-basics-training\a9e0bf4e-0d08-4082-a38a-5b8886538508\scratchpad\pptx\assets\wolke.png">    </p:cNvPr>
+          <p:cNvPr id="2" name="Image 0" descr="C:\Users\Thanam\AppData\Local\Temp\claude\c--Projekt-Trainings-azure-basics-training\a7a6b8eb-22f3-4b42-aecc-5af05d1502b1\scratchpad\folien\assets\wolke.png">    </p:cNvPr>
           <p:cNvPicPr>
             <a:picLocks noChangeAspect="1"/>
           </p:cNvPicPr>
@@ -1822,7 +1822,7 @@
       </p:pic>
       <p:pic>
         <p:nvPicPr>
-          <p:cNvPr id="3" name="Image 1" descr="C:\Users\Thanam\AppData\Local\Temp\claude\c--Projekt-Trainings-azure-basics-training\a9e0bf4e-0d08-4082-a38a-5b8886538508\scratchpad\pptx\assets\logo-hell.png">    </p:cNvPr>
+          <p:cNvPr id="3" name="Image 1" descr="C:\Users\Thanam\AppData\Local\Temp\claude\c--Projekt-Trainings-azure-basics-training\a7a6b8eb-22f3-4b42-aecc-5af05d1502b1\scratchpad\folien\assets\logo-dunkel.png">    </p:cNvPr>
           <p:cNvPicPr>
             <a:picLocks noChangeAspect="1"/>
           </p:cNvPicPr>
@@ -1870,7 +1870,7 @@
               <a:buNone/>
               <a:defRPr lang="en-US" sz="4000" b="1" dirty="0">
                 <a:solidFill>
-                  <a:srgbClr val="FFFFFF"/>
+                  <a:srgbClr val="27303A"/>
                 </a:solidFill>
               </a:defRPr>
             </a:lvl1pPr>
@@ -1909,7 +1909,7 @@
               <a:buNone/>
               <a:defRPr lang="en-US" sz="2000" dirty="0">
                 <a:solidFill>
-                  <a:srgbClr val="DEE2FB"/>
+                  <a:srgbClr val="006FAD"/>
                 </a:solidFill>
               </a:defRPr>
             </a:lvl1pPr>
@@ -1956,7 +1956,7 @@
       </p:grpSpPr>
       <p:pic>
         <p:nvPicPr>
-          <p:cNvPr id="2" name="Image 0" descr="C:\Users\Thanam\AppData\Local\Temp\claude\c--Projekt-Trainings-azure-basics-training\a9e0bf4e-0d08-4082-a38a-5b8886538508\scratchpad\pptx\assets\logo-dunkel.png">    </p:cNvPr>
+          <p:cNvPr id="2" name="Image 0" descr="C:\Users\Thanam\AppData\Local\Temp\claude\c--Projekt-Trainings-azure-basics-training\a7a6b8eb-22f3-4b42-aecc-5af05d1502b1\scratchpad\folien\assets\logo-dunkel.png">    </p:cNvPr>
           <p:cNvPicPr>
             <a:picLocks noChangeAspect="1"/>
           </p:cNvPicPr>
@@ -2112,7 +2112,7 @@
     <p:bg>
       <p:bgPr>
         <a:solidFill>
-          <a:srgbClr val="27303A"/>
+          <a:srgbClr val="FFFFFF"/>
         </a:solidFill>
       </p:bgPr>
     </p:bg>
@@ -2132,7 +2132,7 @@
       </p:grpSpPr>
       <p:pic>
         <p:nvPicPr>
-          <p:cNvPr id="2" name="Image 0" descr="C:\Users\Thanam\AppData\Local\Temp\claude\c--Projekt-Trainings-azure-basics-training\a9e0bf4e-0d08-4082-a38a-5b8886538508\scratchpad\pptx\assets\logo-hell.png">    </p:cNvPr>
+          <p:cNvPr id="2" name="Image 0" descr="C:\Users\Thanam\AppData\Local\Temp\claude\c--Projekt-Trainings-azure-basics-training\a7a6b8eb-22f3-4b42-aecc-5af05d1502b1\scratchpad\folien\assets\logo-dunkel.png">    </p:cNvPr>
           <p:cNvPicPr>
             <a:picLocks noChangeAspect="1"/>
           </p:cNvPicPr>
@@ -2180,7 +2180,7 @@
               <a:buNone/>
               <a:defRPr lang="en-US" sz="4000" b="1" dirty="0">
                 <a:solidFill>
-                  <a:srgbClr val="FFFFFF"/>
+                  <a:srgbClr val="27303A"/>
                 </a:solidFill>
               </a:defRPr>
             </a:lvl1pPr>
@@ -2219,7 +2219,7 @@
               <a:buNone/>
               <a:defRPr lang="en-US" sz="2000" dirty="0">
                 <a:solidFill>
-                  <a:srgbClr val="DEE2FB"/>
+                  <a:srgbClr val="006FAD"/>
                 </a:solidFill>
               </a:defRPr>
             </a:lvl1pPr>
@@ -2612,7 +2612,7 @@
             <a:r>
               <a:rPr lang="en-US" sz="4400" b="1" dirty="0">
                 <a:solidFill>
-                  <a:srgbClr val="FFFFFF"/>
+                  <a:srgbClr val="27303A"/>
                 </a:solidFill>
               </a:rPr>
               <a:t>Vom Hypervisor zum Hyperscaler</a:t>
@@ -2650,10 +2650,10 @@
             <a:r>
               <a:rPr lang="en-US" sz="2000" dirty="0">
                 <a:solidFill>
-                  <a:srgbClr val="DEE2FB"/>
+                  <a:srgbClr val="006FAD"/>
                 </a:solidFill>
               </a:rPr>
-              <a:t>Input 3 Tag 1 · Input 1 Tag 2 · Cloud-Grundlagen</a:t>
+              <a:t>Input 1 Tag 2 · Cloud-Grundlagen</a:t>
             </a:r>
             <a:endParaRPr lang="en-US" sz="2000" dirty="0"/>
           </a:p>
@@ -2812,7 +2812,7 @@
       </p:sp>
       <p:pic>
         <p:nvPicPr>
-          <p:cNvPr id="6" name="icon-FaQuestionCircle" descr="C:\Users\Thanam\AppData\Local\Temp\claude\c--Projekt-Trainings-azure-basics-training\a9e0bf4e-0d08-4082-a38a-5b8886538508\scratchpad\pptx\assets\icons\FaQuestionCircle.png">    </p:cNvPr>
+          <p:cNvPr id="6" name="icon-FaQuestionCircle" descr="C:\Users\Thanam\AppData\Local\Temp\claude\c--Projekt-Trainings-azure-basics-training\a7a6b8eb-22f3-4b42-aecc-5af05d1502b1\scratchpad\folien\assets\icons\FaQuestionCircle.png">    </p:cNvPr>
           <p:cNvPicPr>
             <a:picLocks noChangeAspect="1"/>
           </p:cNvPicPr>
@@ -2965,7 +2965,7 @@
       </p:sp>
       <p:pic>
         <p:nvPicPr>
-          <p:cNvPr id="11" name="icon-FaQuestionCircle" descr="C:\Users\Thanam\AppData\Local\Temp\claude\c--Projekt-Trainings-azure-basics-training\a9e0bf4e-0d08-4082-a38a-5b8886538508\scratchpad\pptx\assets\icons\FaQuestionCircle.png">    </p:cNvPr>
+          <p:cNvPr id="11" name="icon-FaQuestionCircle" descr="C:\Users\Thanam\AppData\Local\Temp\claude\c--Projekt-Trainings-azure-basics-training\a7a6b8eb-22f3-4b42-aecc-5af05d1502b1\scratchpad\folien\assets\icons\FaQuestionCircle.png">    </p:cNvPr>
           <p:cNvPicPr>
             <a:picLocks noChangeAspect="1"/>
           </p:cNvPicPr>
@@ -3118,7 +3118,7 @@
       </p:sp>
       <p:pic>
         <p:nvPicPr>
-          <p:cNvPr id="16" name="icon-FaQuestionCircle" descr="C:\Users\Thanam\AppData\Local\Temp\claude\c--Projekt-Trainings-azure-basics-training\a9e0bf4e-0d08-4082-a38a-5b8886538508\scratchpad\pptx\assets\icons\FaQuestionCircle.png">    </p:cNvPr>
+          <p:cNvPr id="16" name="icon-FaQuestionCircle" descr="C:\Users\Thanam\AppData\Local\Temp\claude\c--Projekt-Trainings-azure-basics-training\a7a6b8eb-22f3-4b42-aecc-5af05d1502b1\scratchpad\folien\assets\icons\FaQuestionCircle.png">    </p:cNvPr>
           <p:cNvPicPr>
             <a:picLocks noChangeAspect="1"/>
           </p:cNvPicPr>
@@ -3352,7 +3352,7 @@
       </p:sp>
       <p:pic>
         <p:nvPicPr>
-          <p:cNvPr id="4" name="icon-FaBook" descr="C:\Users\Thanam\AppData\Local\Temp\claude\c--Projekt-Trainings-azure-basics-training\a9e0bf4e-0d08-4082-a38a-5b8886538508\scratchpad\pptx\assets\icons\FaBook.png">    </p:cNvPr>
+          <p:cNvPr id="4" name="icon-FaBook" descr="C:\Users\Thanam\AppData\Local\Temp\claude\c--Projekt-Trainings-azure-basics-training\a7a6b8eb-22f3-4b42-aecc-5af05d1502b1\scratchpad\folien\assets\icons\FaBook.png">    </p:cNvPr>
           <p:cNvPicPr>
             <a:picLocks noChangeAspect="1"/>
           </p:cNvPicPr>
@@ -3451,7 +3451,7 @@
       </p:sp>
       <p:pic>
         <p:nvPicPr>
-          <p:cNvPr id="7" name="icon-FaGraduationCap" descr="C:\Users\Thanam\AppData\Local\Temp\claude\c--Projekt-Trainings-azure-basics-training\a9e0bf4e-0d08-4082-a38a-5b8886538508\scratchpad\pptx\assets\icons\FaGraduationCap.png">    </p:cNvPr>
+          <p:cNvPr id="7" name="icon-FaGraduationCap" descr="C:\Users\Thanam\AppData\Local\Temp\claude\c--Projekt-Trainings-azure-basics-training\a7a6b8eb-22f3-4b42-aecc-5af05d1502b1\scratchpad\folien\assets\icons\FaGraduationCap.png">    </p:cNvPr>
           <p:cNvPicPr>
             <a:picLocks noChangeAspect="1"/>
           </p:cNvPicPr>
@@ -3550,7 +3550,7 @@
       </p:sp>
       <p:pic>
         <p:nvPicPr>
-          <p:cNvPr id="10" name="icon-FaBook" descr="C:\Users\Thanam\AppData\Local\Temp\claude\c--Projekt-Trainings-azure-basics-training\a9e0bf4e-0d08-4082-a38a-5b8886538508\scratchpad\pptx\assets\icons\FaBook.png">    </p:cNvPr>
+          <p:cNvPr id="10" name="icon-FaBook" descr="C:\Users\Thanam\AppData\Local\Temp\claude\c--Projekt-Trainings-azure-basics-training\a7a6b8eb-22f3-4b42-aecc-5af05d1502b1\scratchpad\folien\assets\icons\FaBook.png">    </p:cNvPr>
           <p:cNvPicPr>
             <a:picLocks noChangeAspect="1"/>
           </p:cNvPicPr>
@@ -3721,7 +3721,7 @@
             <a:r>
               <a:rPr lang="en-US" sz="4000" b="1" dirty="0">
                 <a:solidFill>
-                  <a:srgbClr val="FFFFFF"/>
+                  <a:srgbClr val="27303A"/>
                 </a:solidFill>
               </a:rPr>
               <a:t>Jetzt du</a:t>
@@ -3759,7 +3759,7 @@
             <a:r>
               <a:rPr lang="en-US" sz="2000" dirty="0">
                 <a:solidFill>
-                  <a:srgbClr val="DEE2FB"/>
+                  <a:srgbClr val="006FAD"/>
                 </a:solidFill>
               </a:rPr>
               <a:t>Auftrag 2.1: IaaS, PaaS oder SaaS?</a:t>
@@ -4053,7 +4053,7 @@
       </p:sp>
       <p:pic>
         <p:nvPicPr>
-          <p:cNvPr id="5" name="icon-FaHandsHelping" descr="C:\Users\Thanam\AppData\Local\Temp\claude\c--Projekt-Trainings-azure-basics-training\a9e0bf4e-0d08-4082-a38a-5b8886538508\scratchpad\pptx\assets\icons\FaHandsHelping.png">    </p:cNvPr>
+          <p:cNvPr id="5" name="icon-FaHandsHelping" descr="C:\Users\Thanam\AppData\Local\Temp\claude\c--Projekt-Trainings-azure-basics-training\a7a6b8eb-22f3-4b42-aecc-5af05d1502b1\scratchpad\folien\assets\icons\FaHandsHelping.png">    </p:cNvPr>
           <p:cNvPicPr>
             <a:picLocks noChangeAspect="1"/>
           </p:cNvPicPr>
@@ -4206,7 +4206,7 @@
       </p:sp>
       <p:pic>
         <p:nvPicPr>
-          <p:cNvPr id="10" name="icon-FaGlobeEurope" descr="C:\Users\Thanam\AppData\Local\Temp\claude\c--Projekt-Trainings-azure-basics-training\a9e0bf4e-0d08-4082-a38a-5b8886538508\scratchpad\pptx\assets\icons\FaGlobeEurope.png">    </p:cNvPr>
+          <p:cNvPr id="10" name="icon-FaGlobeEurope" descr="C:\Users\Thanam\AppData\Local\Temp\claude\c--Projekt-Trainings-azure-basics-training\a7a6b8eb-22f3-4b42-aecc-5af05d1502b1\scratchpad\folien\assets\icons\FaGlobeEurope.png">    </p:cNvPr>
           <p:cNvPicPr>
             <a:picLocks noChangeAspect="1"/>
           </p:cNvPicPr>
@@ -4359,7 +4359,7 @@
       </p:sp>
       <p:pic>
         <p:nvPicPr>
-          <p:cNvPr id="15" name="icon-FaUsers" descr="C:\Users\Thanam\AppData\Local\Temp\claude\c--Projekt-Trainings-azure-basics-training\a9e0bf4e-0d08-4082-a38a-5b8886538508\scratchpad\pptx\assets\icons\FaUsers.png">    </p:cNvPr>
+          <p:cNvPr id="15" name="icon-FaUsers" descr="C:\Users\Thanam\AppData\Local\Temp\claude\c--Projekt-Trainings-azure-basics-training\a7a6b8eb-22f3-4b42-aecc-5af05d1502b1\scratchpad\folien\assets\icons\FaUsers.png">    </p:cNvPr>
           <p:cNvPicPr>
             <a:picLocks noChangeAspect="1"/>
           </p:cNvPicPr>
@@ -4512,7 +4512,7 @@
       </p:sp>
       <p:pic>
         <p:nvPicPr>
-          <p:cNvPr id="20" name="icon-FaBolt" descr="C:\Users\Thanam\AppData\Local\Temp\claude\c--Projekt-Trainings-azure-basics-training\a9e0bf4e-0d08-4082-a38a-5b8886538508\scratchpad\pptx\assets\icons\FaBolt.png">    </p:cNvPr>
+          <p:cNvPr id="20" name="icon-FaBolt" descr="C:\Users\Thanam\AppData\Local\Temp\claude\c--Projekt-Trainings-azure-basics-training\a7a6b8eb-22f3-4b42-aecc-5af05d1502b1\scratchpad\folien\assets\icons\FaBolt.png">    </p:cNvPr>
           <p:cNvPicPr>
             <a:picLocks noChangeAspect="1"/>
           </p:cNvPicPr>
@@ -4665,7 +4665,7 @@
       </p:sp>
       <p:pic>
         <p:nvPicPr>
-          <p:cNvPr id="25" name="icon-FaCoins" descr="C:\Users\Thanam\AppData\Local\Temp\claude\c--Projekt-Trainings-azure-basics-training\a9e0bf4e-0d08-4082-a38a-5b8886538508\scratchpad\pptx\assets\icons\FaCoins.png">    </p:cNvPr>
+          <p:cNvPr id="25" name="icon-FaCoins" descr="C:\Users\Thanam\AppData\Local\Temp\claude\c--Projekt-Trainings-azure-basics-training\a7a6b8eb-22f3-4b42-aecc-5af05d1502b1\scratchpad\folien\assets\icons\FaCoins.png">    </p:cNvPr>
           <p:cNvPicPr>
             <a:picLocks noChangeAspect="1"/>
           </p:cNvPicPr>
@@ -5058,7 +5058,7 @@
       </p:sp>
       <p:pic>
         <p:nvPicPr>
-          <p:cNvPr id="5" name="icon-FaBuilding" descr="C:\Users\Thanam\AppData\Local\Temp\claude\c--Projekt-Trainings-azure-basics-training\a9e0bf4e-0d08-4082-a38a-5b8886538508\scratchpad\pptx\assets\icons\FaBuilding.png">    </p:cNvPr>
+          <p:cNvPr id="5" name="icon-FaBuilding" descr="C:\Users\Thanam\AppData\Local\Temp\claude\c--Projekt-Trainings-azure-basics-training\a7a6b8eb-22f3-4b42-aecc-5af05d1502b1\scratchpad\folien\assets\icons\FaBuilding.png">    </p:cNvPr>
           <p:cNvPicPr>
             <a:picLocks noChangeAspect="1"/>
           </p:cNvPicPr>
@@ -5211,7 +5211,7 @@
       </p:sp>
       <p:pic>
         <p:nvPicPr>
-          <p:cNvPr id="10" name="icon-FaServer" descr="C:\Users\Thanam\AppData\Local\Temp\claude\c--Projekt-Trainings-azure-basics-training\a9e0bf4e-0d08-4082-a38a-5b8886538508\scratchpad\pptx\assets\icons\FaServer.png">    </p:cNvPr>
+          <p:cNvPr id="10" name="icon-FaServer" descr="C:\Users\Thanam\AppData\Local\Temp\claude\c--Projekt-Trainings-azure-basics-training\a7a6b8eb-22f3-4b42-aecc-5af05d1502b1\scratchpad\folien\assets\icons\FaServer.png">    </p:cNvPr>
           <p:cNvPicPr>
             <a:picLocks noChangeAspect="1"/>
           </p:cNvPicPr>
@@ -5364,7 +5364,7 @@
       </p:sp>
       <p:pic>
         <p:nvPicPr>
-          <p:cNvPr id="15" name="icon-FaRocket" descr="C:\Users\Thanam\AppData\Local\Temp\claude\c--Projekt-Trainings-azure-basics-training\a9e0bf4e-0d08-4082-a38a-5b8886538508\scratchpad\pptx\assets\icons\FaRocket.png">    </p:cNvPr>
+          <p:cNvPr id="15" name="icon-FaRocket" descr="C:\Users\Thanam\AppData\Local\Temp\claude\c--Projekt-Trainings-azure-basics-training\a7a6b8eb-22f3-4b42-aecc-5af05d1502b1\scratchpad\folien\assets\icons\FaRocket.png">    </p:cNvPr>
           <p:cNvPicPr>
             <a:picLocks noChangeAspect="1"/>
           </p:cNvPicPr>
@@ -5517,7 +5517,7 @@
       </p:sp>
       <p:pic>
         <p:nvPicPr>
-          <p:cNvPr id="20" name="icon-FaPizzaSlice" descr="C:\Users\Thanam\AppData\Local\Temp\claude\c--Projekt-Trainings-azure-basics-training\a9e0bf4e-0d08-4082-a38a-5b8886538508\scratchpad\pptx\assets\icons\FaPizzaSlice.png">    </p:cNvPr>
+          <p:cNvPr id="20" name="icon-FaPizzaSlice" descr="C:\Users\Thanam\AppData\Local\Temp\claude\c--Projekt-Trainings-azure-basics-training\a7a6b8eb-22f3-4b42-aecc-5af05d1502b1\scratchpad\folien\assets\icons\FaPizzaSlice.png">    </p:cNvPr>
           <p:cNvPicPr>
             <a:picLocks noChangeAspect="1"/>
           </p:cNvPicPr>
@@ -6878,7 +6878,7 @@
       </p:sp>
       <p:pic>
         <p:nvPicPr>
-          <p:cNvPr id="5" name="icon-FaGlobeEurope" descr="C:\Users\Thanam\AppData\Local\Temp\claude\c--Projekt-Trainings-azure-basics-training\a9e0bf4e-0d08-4082-a38a-5b8886538508\scratchpad\pptx\assets\icons\FaGlobeEurope.png">    </p:cNvPr>
+          <p:cNvPr id="5" name="icon-FaGlobeEurope" descr="C:\Users\Thanam\AppData\Local\Temp\claude\c--Projekt-Trainings-azure-basics-training\a7a6b8eb-22f3-4b42-aecc-5af05d1502b1\scratchpad\folien\assets\icons\FaGlobeEurope.png">    </p:cNvPr>
           <p:cNvPicPr>
             <a:picLocks noChangeAspect="1"/>
           </p:cNvPicPr>
@@ -7031,7 +7031,7 @@
       </p:sp>
       <p:pic>
         <p:nvPicPr>
-          <p:cNvPr id="10" name="icon-FaLock" descr="C:\Users\Thanam\AppData\Local\Temp\claude\c--Projekt-Trainings-azure-basics-training\a9e0bf4e-0d08-4082-a38a-5b8886538508\scratchpad\pptx\assets\icons\FaLock.png">    </p:cNvPr>
+          <p:cNvPr id="10" name="icon-FaLock" descr="C:\Users\Thanam\AppData\Local\Temp\claude\c--Projekt-Trainings-azure-basics-training\a7a6b8eb-22f3-4b42-aecc-5af05d1502b1\scratchpad\folien\assets\icons\FaLock.png">    </p:cNvPr>
           <p:cNvPicPr>
             <a:picLocks noChangeAspect="1"/>
           </p:cNvPicPr>
@@ -7184,7 +7184,7 @@
       </p:sp>
       <p:pic>
         <p:nvPicPr>
-          <p:cNvPr id="15" name="icon-FaExchangeAlt" descr="C:\Users\Thanam\AppData\Local\Temp\claude\c--Projekt-Trainings-azure-basics-training\a9e0bf4e-0d08-4082-a38a-5b8886538508\scratchpad\pptx\assets\icons\FaExchangeAlt.png">    </p:cNvPr>
+          <p:cNvPr id="15" name="icon-FaExchangeAlt" descr="C:\Users\Thanam\AppData\Local\Temp\claude\c--Projekt-Trainings-azure-basics-training\a7a6b8eb-22f3-4b42-aecc-5af05d1502b1\scratchpad\folien\assets\icons\FaExchangeAlt.png">    </p:cNvPr>
           <p:cNvPicPr>
             <a:picLocks noChangeAspect="1"/>
           </p:cNvPicPr>
@@ -7613,7 +7613,7 @@
       </p:sp>
       <p:pic>
         <p:nvPicPr>
-          <p:cNvPr id="5" name="icon-FaBuilding" descr="C:\Users\Thanam\AppData\Local\Temp\claude\c--Projekt-Trainings-azure-basics-training\a9e0bf4e-0d08-4082-a38a-5b8886538508\scratchpad\pptx\assets\icons\FaBuilding.png">    </p:cNvPr>
+          <p:cNvPr id="5" name="icon-FaBuilding" descr="C:\Users\Thanam\AppData\Local\Temp\claude\c--Projekt-Trainings-azure-basics-training\a7a6b8eb-22f3-4b42-aecc-5af05d1502b1\scratchpad\folien\assets\icons\FaBuilding.png">    </p:cNvPr>
           <p:cNvPicPr>
             <a:picLocks noChangeAspect="1"/>
           </p:cNvPicPr>
@@ -7801,7 +7801,7 @@
       </p:sp>
       <p:pic>
         <p:nvPicPr>
-          <p:cNvPr id="10" name="icon-FaUserShield" descr="C:\Users\Thanam\AppData\Local\Temp\claude\c--Projekt-Trainings-azure-basics-training\a9e0bf4e-0d08-4082-a38a-5b8886538508\scratchpad\pptx\assets\icons\FaUserShield.png">    </p:cNvPr>
+          <p:cNvPr id="10" name="icon-FaUserShield" descr="C:\Users\Thanam\AppData\Local\Temp\claude\c--Projekt-Trainings-azure-basics-training\a7a6b8eb-22f3-4b42-aecc-5af05d1502b1\scratchpad\folien\assets\icons\FaUserShield.png">    </p:cNvPr>
           <p:cNvPicPr>
             <a:picLocks noChangeAspect="1"/>
           </p:cNvPicPr>
